--- a/Presentations/Final Project Presentation.pptx
+++ b/Presentations/Final Project Presentation.pptx
@@ -132,6 +132,177 @@
 </p:presentation>
 </file>
 
+<file path=ppt/changesInfos/changesInfo1.xml><?xml version="1.0" encoding="utf-8"?>
+<pc:chgInfo xmlns:a="http://schemas.openxmlformats.org/drawingml/2006/main" xmlns:r="http://schemas.openxmlformats.org/officeDocument/2006/relationships" xmlns:ac="http://schemas.microsoft.com/office/drawing/2013/main/command" xmlns:pc="http://schemas.microsoft.com/office/powerpoint/2013/main/command">
+  <pc:docChgLst>
+    <pc:chgData name="Kyle Haustein" userId="2449f22f7128ebcc" providerId="LiveId" clId="{5ED12638-68BE-442B-B58B-5EC9C4DF6A52}"/>
+    <pc:docChg chg="undo custSel modSld">
+      <pc:chgData name="Kyle Haustein" userId="2449f22f7128ebcc" providerId="LiveId" clId="{5ED12638-68BE-442B-B58B-5EC9C4DF6A52}" dt="2026-08-14T09:11:35.578" v="33" actId="1076"/>
+      <pc:docMkLst>
+        <pc:docMk/>
+      </pc:docMkLst>
+      <pc:sldChg chg="modSp mod">
+        <pc:chgData name="Kyle Haustein" userId="2449f22f7128ebcc" providerId="LiveId" clId="{5ED12638-68BE-442B-B58B-5EC9C4DF6A52}" dt="2026-08-14T09:11:35.578" v="33" actId="1076"/>
+        <pc:sldMkLst>
+          <pc:docMk/>
+          <pc:sldMk cId="0" sldId="260"/>
+        </pc:sldMkLst>
+        <pc:spChg chg="mod">
+          <ac:chgData name="Kyle Haustein" userId="2449f22f7128ebcc" providerId="LiveId" clId="{5ED12638-68BE-442B-B58B-5EC9C4DF6A52}" dt="2026-08-14T09:11:35.578" v="33" actId="1076"/>
+          <ac:spMkLst>
+            <pc:docMk/>
+            <pc:sldMk cId="0" sldId="260"/>
+            <ac:spMk id="8" creationId="{00000000-0000-0000-0000-000000000000}"/>
+          </ac:spMkLst>
+        </pc:spChg>
+      </pc:sldChg>
+      <pc:sldChg chg="modSp mod">
+        <pc:chgData name="Kyle Haustein" userId="2449f22f7128ebcc" providerId="LiveId" clId="{5ED12638-68BE-442B-B58B-5EC9C4DF6A52}" dt="2026-08-14T06:50:43.478" v="32" actId="14100"/>
+        <pc:sldMkLst>
+          <pc:docMk/>
+          <pc:sldMk cId="0" sldId="262"/>
+        </pc:sldMkLst>
+        <pc:spChg chg="mod">
+          <ac:chgData name="Kyle Haustein" userId="2449f22f7128ebcc" providerId="LiveId" clId="{5ED12638-68BE-442B-B58B-5EC9C4DF6A52}" dt="2026-08-14T06:50:43.478" v="32" actId="14100"/>
+          <ac:spMkLst>
+            <pc:docMk/>
+            <pc:sldMk cId="0" sldId="262"/>
+            <ac:spMk id="38" creationId="{00000000-0000-0000-0000-000000000000}"/>
+          </ac:spMkLst>
+        </pc:spChg>
+      </pc:sldChg>
+      <pc:sldChg chg="delSp modSp mod">
+        <pc:chgData name="Kyle Haustein" userId="2449f22f7128ebcc" providerId="LiveId" clId="{5ED12638-68BE-442B-B58B-5EC9C4DF6A52}" dt="2026-08-14T06:49:19.281" v="31" actId="14100"/>
+        <pc:sldMkLst>
+          <pc:docMk/>
+          <pc:sldMk cId="679326677" sldId="266"/>
+        </pc:sldMkLst>
+        <pc:spChg chg="del">
+          <ac:chgData name="Kyle Haustein" userId="2449f22f7128ebcc" providerId="LiveId" clId="{5ED12638-68BE-442B-B58B-5EC9C4DF6A52}" dt="2026-08-14T06:47:54.050" v="13" actId="478"/>
+          <ac:spMkLst>
+            <pc:docMk/>
+            <pc:sldMk cId="679326677" sldId="266"/>
+            <ac:spMk id="6" creationId="{2ADD9DC2-3BEE-FAC0-9163-22E510EC4827}"/>
+          </ac:spMkLst>
+        </pc:spChg>
+        <pc:spChg chg="mod">
+          <ac:chgData name="Kyle Haustein" userId="2449f22f7128ebcc" providerId="LiveId" clId="{5ED12638-68BE-442B-B58B-5EC9C4DF6A52}" dt="2026-08-14T06:47:52.124" v="12" actId="1076"/>
+          <ac:spMkLst>
+            <pc:docMk/>
+            <pc:sldMk cId="679326677" sldId="266"/>
+            <ac:spMk id="7" creationId="{D3EE5F5C-3851-F6D9-CC6C-4C216E028757}"/>
+          </ac:spMkLst>
+        </pc:spChg>
+        <pc:spChg chg="mod">
+          <ac:chgData name="Kyle Haustein" userId="2449f22f7128ebcc" providerId="LiveId" clId="{5ED12638-68BE-442B-B58B-5EC9C4DF6A52}" dt="2026-08-14T06:48:05.418" v="17" actId="14100"/>
+          <ac:spMkLst>
+            <pc:docMk/>
+            <pc:sldMk cId="679326677" sldId="266"/>
+            <ac:spMk id="9" creationId="{DEE3081D-B3CE-4228-B285-5BAAE184991D}"/>
+          </ac:spMkLst>
+        </pc:spChg>
+        <pc:spChg chg="del">
+          <ac:chgData name="Kyle Haustein" userId="2449f22f7128ebcc" providerId="LiveId" clId="{5ED12638-68BE-442B-B58B-5EC9C4DF6A52}" dt="2026-08-14T06:47:56.685" v="14" actId="478"/>
+          <ac:spMkLst>
+            <pc:docMk/>
+            <pc:sldMk cId="679326677" sldId="266"/>
+            <ac:spMk id="10" creationId="{CBB883C5-16D5-F3FB-623F-29CFB3AF2814}"/>
+          </ac:spMkLst>
+        </pc:spChg>
+        <pc:spChg chg="mod">
+          <ac:chgData name="Kyle Haustein" userId="2449f22f7128ebcc" providerId="LiveId" clId="{5ED12638-68BE-442B-B58B-5EC9C4DF6A52}" dt="2026-08-14T06:47:28.443" v="8" actId="1076"/>
+          <ac:spMkLst>
+            <pc:docMk/>
+            <pc:sldMk cId="679326677" sldId="266"/>
+            <ac:spMk id="11" creationId="{A5E90527-A95B-2DC8-FCA6-AF5279950656}"/>
+          </ac:spMkLst>
+        </pc:spChg>
+        <pc:spChg chg="del">
+          <ac:chgData name="Kyle Haustein" userId="2449f22f7128ebcc" providerId="LiveId" clId="{5ED12638-68BE-442B-B58B-5EC9C4DF6A52}" dt="2026-08-14T06:47:59.337" v="15" actId="478"/>
+          <ac:spMkLst>
+            <pc:docMk/>
+            <pc:sldMk cId="679326677" sldId="266"/>
+            <ac:spMk id="14" creationId="{0EE8D648-C28F-1A5F-7AA0-1740C89615AB}"/>
+          </ac:spMkLst>
+        </pc:spChg>
+        <pc:spChg chg="mod">
+          <ac:chgData name="Kyle Haustein" userId="2449f22f7128ebcc" providerId="LiveId" clId="{5ED12638-68BE-442B-B58B-5EC9C4DF6A52}" dt="2026-08-14T06:47:38.595" v="9" actId="1076"/>
+          <ac:spMkLst>
+            <pc:docMk/>
+            <pc:sldMk cId="679326677" sldId="266"/>
+            <ac:spMk id="15" creationId="{E4998D12-8E28-4A43-CE89-6B95EF9276C3}"/>
+          </ac:spMkLst>
+        </pc:spChg>
+        <pc:spChg chg="del">
+          <ac:chgData name="Kyle Haustein" userId="2449f22f7128ebcc" providerId="LiveId" clId="{5ED12638-68BE-442B-B58B-5EC9C4DF6A52}" dt="2026-08-14T06:48:23.792" v="22" actId="478"/>
+          <ac:spMkLst>
+            <pc:docMk/>
+            <pc:sldMk cId="679326677" sldId="266"/>
+            <ac:spMk id="23" creationId="{E0F1D9FB-A8B9-4E9F-642B-D0DE5FEFE16F}"/>
+          </ac:spMkLst>
+        </pc:spChg>
+        <pc:spChg chg="del">
+          <ac:chgData name="Kyle Haustein" userId="2449f22f7128ebcc" providerId="LiveId" clId="{5ED12638-68BE-442B-B58B-5EC9C4DF6A52}" dt="2026-08-14T06:48:34.120" v="25" actId="478"/>
+          <ac:spMkLst>
+            <pc:docMk/>
+            <pc:sldMk cId="679326677" sldId="266"/>
+            <ac:spMk id="31" creationId="{5F72BC41-70AB-ADE1-F5DC-C82D5DD10BE0}"/>
+          </ac:spMkLst>
+        </pc:spChg>
+        <pc:picChg chg="mod">
+          <ac:chgData name="Kyle Haustein" userId="2449f22f7128ebcc" providerId="LiveId" clId="{5ED12638-68BE-442B-B58B-5EC9C4DF6A52}" dt="2026-08-14T06:48:31.383" v="24" actId="14100"/>
+          <ac:picMkLst>
+            <pc:docMk/>
+            <pc:sldMk cId="679326677" sldId="266"/>
+            <ac:picMk id="21" creationId="{8CB298AF-C8E9-B7A6-C9D1-C4A23E2333FF}"/>
+          </ac:picMkLst>
+        </pc:picChg>
+        <pc:picChg chg="mod">
+          <ac:chgData name="Kyle Haustein" userId="2449f22f7128ebcc" providerId="LiveId" clId="{5ED12638-68BE-442B-B58B-5EC9C4DF6A52}" dt="2026-08-14T06:48:13.107" v="19" actId="14100"/>
+          <ac:picMkLst>
+            <pc:docMk/>
+            <pc:sldMk cId="679326677" sldId="266"/>
+            <ac:picMk id="33" creationId="{9A610D21-96A5-CC66-D817-CABE04BB23E3}"/>
+          </ac:picMkLst>
+        </pc:picChg>
+        <pc:picChg chg="mod">
+          <ac:chgData name="Kyle Haustein" userId="2449f22f7128ebcc" providerId="LiveId" clId="{5ED12638-68BE-442B-B58B-5EC9C4DF6A52}" dt="2026-08-14T06:48:21.088" v="21" actId="14100"/>
+          <ac:picMkLst>
+            <pc:docMk/>
+            <pc:sldMk cId="679326677" sldId="266"/>
+            <ac:picMk id="35" creationId="{0D3C1CD4-154D-3767-15A3-42D5F1F99C04}"/>
+          </ac:picMkLst>
+        </pc:picChg>
+        <pc:picChg chg="mod">
+          <ac:chgData name="Kyle Haustein" userId="2449f22f7128ebcc" providerId="LiveId" clId="{5ED12638-68BE-442B-B58B-5EC9C4DF6A52}" dt="2026-08-14T06:49:19.281" v="31" actId="14100"/>
+          <ac:picMkLst>
+            <pc:docMk/>
+            <pc:sldMk cId="679326677" sldId="266"/>
+            <ac:picMk id="37" creationId="{812E130D-0DD6-6B43-6113-54655E6C4FA3}"/>
+          </ac:picMkLst>
+        </pc:picChg>
+        <pc:picChg chg="mod">
+          <ac:chgData name="Kyle Haustein" userId="2449f22f7128ebcc" providerId="LiveId" clId="{5ED12638-68BE-442B-B58B-5EC9C4DF6A52}" dt="2026-08-14T06:48:43.075" v="27" actId="14100"/>
+          <ac:picMkLst>
+            <pc:docMk/>
+            <pc:sldMk cId="679326677" sldId="266"/>
+            <ac:picMk id="39" creationId="{A31A0DB4-B2E2-C304-63F1-D0073AFACFFD}"/>
+          </ac:picMkLst>
+        </pc:picChg>
+        <pc:picChg chg="del">
+          <ac:chgData name="Kyle Haustein" userId="2449f22f7128ebcc" providerId="LiveId" clId="{5ED12638-68BE-442B-B58B-5EC9C4DF6A52}" dt="2026-08-14T06:48:45.424" v="28" actId="478"/>
+          <ac:picMkLst>
+            <pc:docMk/>
+            <pc:sldMk cId="679326677" sldId="266"/>
+            <ac:picMk id="45" creationId="{40C73CC9-3E73-3960-B53A-DD7A8034C9CD}"/>
+          </ac:picMkLst>
+        </pc:picChg>
+      </pc:sldChg>
+    </pc:docChg>
+  </pc:docChgLst>
+</pc:chgInfo>
+</file>
+
 <file path=ppt/slideLayouts/slideLayout1.xml><?xml version="1.0" encoding="utf-8"?>
 <p:sldLayout xmlns:a="http://schemas.openxmlformats.org/drawingml/2006/main" xmlns:r="http://schemas.openxmlformats.org/officeDocument/2006/relationships" xmlns:p="http://schemas.openxmlformats.org/presentationml/2006/main" type="title" preserve="1">
   <p:cSld name="Title Slide">
@@ -311,7 +482,7 @@
           <a:p>
             <a:fld id="{5BCAD085-E8A6-8845-BD4E-CB4CCA059FC4}" type="datetimeFigureOut">
               <a:rPr lang="en-US" smtClean="0"/>
-              <a:t>8/12/2026</a:t>
+              <a:t>8/14/2026</a:t>
             </a:fld>
             <a:endParaRPr lang="en-US"/>
           </a:p>
@@ -479,7 +650,7 @@
           <a:p>
             <a:fld id="{5BCAD085-E8A6-8845-BD4E-CB4CCA059FC4}" type="datetimeFigureOut">
               <a:rPr lang="en-US" smtClean="0"/>
-              <a:t>8/12/2026</a:t>
+              <a:t>8/14/2026</a:t>
             </a:fld>
             <a:endParaRPr lang="en-US"/>
           </a:p>
@@ -657,7 +828,7 @@
           <a:p>
             <a:fld id="{5BCAD085-E8A6-8845-BD4E-CB4CCA059FC4}" type="datetimeFigureOut">
               <a:rPr lang="en-US" smtClean="0"/>
-              <a:t>8/12/2026</a:t>
+              <a:t>8/14/2026</a:t>
             </a:fld>
             <a:endParaRPr lang="en-US"/>
           </a:p>
@@ -825,7 +996,7 @@
           <a:p>
             <a:fld id="{5BCAD085-E8A6-8845-BD4E-CB4CCA059FC4}" type="datetimeFigureOut">
               <a:rPr lang="en-US" smtClean="0"/>
-              <a:t>8/12/2026</a:t>
+              <a:t>8/14/2026</a:t>
             </a:fld>
             <a:endParaRPr lang="en-US"/>
           </a:p>
@@ -1070,7 +1241,7 @@
           <a:p>
             <a:fld id="{5BCAD085-E8A6-8845-BD4E-CB4CCA059FC4}" type="datetimeFigureOut">
               <a:rPr lang="en-US" smtClean="0"/>
-              <a:t>8/12/2026</a:t>
+              <a:t>8/14/2026</a:t>
             </a:fld>
             <a:endParaRPr lang="en-US"/>
           </a:p>
@@ -1355,7 +1526,7 @@
           <a:p>
             <a:fld id="{5BCAD085-E8A6-8845-BD4E-CB4CCA059FC4}" type="datetimeFigureOut">
               <a:rPr lang="en-US" smtClean="0"/>
-              <a:t>8/12/2026</a:t>
+              <a:t>8/14/2026</a:t>
             </a:fld>
             <a:endParaRPr lang="en-US"/>
           </a:p>
@@ -1774,7 +1945,7 @@
           <a:p>
             <a:fld id="{5BCAD085-E8A6-8845-BD4E-CB4CCA059FC4}" type="datetimeFigureOut">
               <a:rPr lang="en-US" smtClean="0"/>
-              <a:t>8/12/2026</a:t>
+              <a:t>8/14/2026</a:t>
             </a:fld>
             <a:endParaRPr lang="en-US"/>
           </a:p>
@@ -1891,7 +2062,7 @@
           <a:p>
             <a:fld id="{5BCAD085-E8A6-8845-BD4E-CB4CCA059FC4}" type="datetimeFigureOut">
               <a:rPr lang="en-US" smtClean="0"/>
-              <a:t>8/12/2026</a:t>
+              <a:t>8/14/2026</a:t>
             </a:fld>
             <a:endParaRPr lang="en-US"/>
           </a:p>
@@ -1986,7 +2157,7 @@
           <a:p>
             <a:fld id="{5BCAD085-E8A6-8845-BD4E-CB4CCA059FC4}" type="datetimeFigureOut">
               <a:rPr lang="en-US" smtClean="0"/>
-              <a:t>8/12/2026</a:t>
+              <a:t>8/14/2026</a:t>
             </a:fld>
             <a:endParaRPr lang="en-US"/>
           </a:p>
@@ -2261,7 +2432,7 @@
           <a:p>
             <a:fld id="{5BCAD085-E8A6-8845-BD4E-CB4CCA059FC4}" type="datetimeFigureOut">
               <a:rPr lang="en-US" smtClean="0"/>
-              <a:t>8/12/2026</a:t>
+              <a:t>8/14/2026</a:t>
             </a:fld>
             <a:endParaRPr lang="en-US"/>
           </a:p>
@@ -2513,7 +2684,7 @@
           <a:p>
             <a:fld id="{5BCAD085-E8A6-8845-BD4E-CB4CCA059FC4}" type="datetimeFigureOut">
               <a:rPr lang="en-US" smtClean="0"/>
-              <a:t>8/12/2026</a:t>
+              <a:t>8/14/2026</a:t>
             </a:fld>
             <a:endParaRPr lang="en-US"/>
           </a:p>
@@ -2724,7 +2895,7 @@
           <a:p>
             <a:fld id="{5BCAD085-E8A6-8845-BD4E-CB4CCA059FC4}" type="datetimeFigureOut">
               <a:rPr lang="en-US" smtClean="0"/>
-              <a:t>8/12/2026</a:t>
+              <a:t>8/14/2026</a:t>
             </a:fld>
             <a:endParaRPr lang="en-US"/>
           </a:p>
@@ -4361,7 +4532,7 @@
           <a:p>
             <a:pPr algn="l"/>
             <a:r>
-              <a:rPr sz="1400" b="0">
+              <a:rPr sz="1400" b="0" dirty="0">
                 <a:solidFill>
                   <a:srgbClr val="636D82"/>
                 </a:solidFill>
@@ -4527,7 +4698,7 @@
           <a:p>
             <a:pPr algn="l"/>
             <a:r>
-              <a:rPr sz="1300" b="0">
+              <a:rPr sz="1300" b="0" dirty="0">
                 <a:solidFill>
                   <a:srgbClr val="1E2739"/>
                 </a:solidFill>
@@ -4693,7 +4864,7 @@
           <a:p>
             <a:pPr algn="l"/>
             <a:r>
-              <a:rPr sz="1300" b="0">
+              <a:rPr sz="1300" b="0" dirty="0">
                 <a:solidFill>
                   <a:srgbClr val="1E2739"/>
                 </a:solidFill>
@@ -5069,8 +5240,8 @@
         </p:blipFill>
         <p:spPr>
           <a:xfrm>
-            <a:off x="4457647" y="4414435"/>
-            <a:ext cx="2414225" cy="2127688"/>
+            <a:off x="4457647" y="4666281"/>
+            <a:ext cx="2414225" cy="672973"/>
           </a:xfrm>
           <a:prstGeom prst="rect">
             <a:avLst/>
@@ -5099,8 +5270,8 @@
         </p:blipFill>
         <p:spPr>
           <a:xfrm>
-            <a:off x="573002" y="1670026"/>
-            <a:ext cx="2414225" cy="2127688"/>
+            <a:off x="573002" y="2602940"/>
+            <a:ext cx="2414225" cy="672972"/>
           </a:xfrm>
           <a:prstGeom prst="rect">
             <a:avLst/>
@@ -5129,8 +5300,8 @@
         </p:blipFill>
         <p:spPr>
           <a:xfrm>
-            <a:off x="8159285" y="1898378"/>
-            <a:ext cx="2414225" cy="2127688"/>
+            <a:off x="8159285" y="2543502"/>
+            <a:ext cx="2414225" cy="732409"/>
           </a:xfrm>
           <a:prstGeom prst="rect">
             <a:avLst/>
@@ -5289,56 +5460,6 @@
       </p:sp>
       <p:sp>
         <p:nvSpPr>
-          <p:cNvPr id="6" name="Rounded Rectangle 5">
-            <a:extLst>
-              <a:ext uri="{FF2B5EF4-FFF2-40B4-BE49-F238E27FC236}">
-                <a16:creationId xmlns:a16="http://schemas.microsoft.com/office/drawing/2014/main" id="{2ADD9DC2-3BEE-FAC0-9163-22E510EC4827}"/>
-              </a:ext>
-            </a:extLst>
-          </p:cNvPr>
-          <p:cNvSpPr/>
-          <p:nvPr/>
-        </p:nvSpPr>
-        <p:spPr>
-          <a:xfrm>
-            <a:off x="932688" y="1843514"/>
-            <a:ext cx="502920" cy="109728"/>
-          </a:xfrm>
-          <a:prstGeom prst="roundRect">
-            <a:avLst/>
-          </a:prstGeom>
-          <a:solidFill>
-            <a:srgbClr val="7552BE"/>
-          </a:solidFill>
-          <a:ln>
-            <a:noFill/>
-          </a:ln>
-        </p:spPr>
-        <p:style>
-          <a:lnRef idx="1">
-            <a:schemeClr val="accent1"/>
-          </a:lnRef>
-          <a:fillRef idx="3">
-            <a:schemeClr val="accent1"/>
-          </a:fillRef>
-          <a:effectRef idx="2">
-            <a:schemeClr val="accent1"/>
-          </a:effectRef>
-          <a:fontRef idx="minor">
-            <a:schemeClr val="lt1"/>
-          </a:fontRef>
-        </p:style>
-        <p:txBody>
-          <a:bodyPr rtlCol="0" anchor="ctr"/>
-          <a:lstStyle/>
-          <a:p>
-            <a:pPr algn="ctr"/>
-            <a:endParaRPr/>
-          </a:p>
-        </p:txBody>
-      </p:sp>
-      <p:sp>
-        <p:nvSpPr>
           <p:cNvPr id="7" name="TextBox 6">
             <a:extLst>
               <a:ext uri="{FF2B5EF4-FFF2-40B4-BE49-F238E27FC236}">
@@ -5351,7 +5472,7 @@
         </p:nvSpPr>
         <p:spPr>
           <a:xfrm>
-            <a:off x="756009" y="2232839"/>
+            <a:off x="725821" y="2756858"/>
             <a:ext cx="2898648" cy="307777"/>
           </a:xfrm>
           <a:prstGeom prst="rect">
@@ -5401,8 +5522,8 @@
         </p:nvSpPr>
         <p:spPr>
           <a:xfrm>
-            <a:off x="4457647" y="1842562"/>
-            <a:ext cx="2316689" cy="2031761"/>
+            <a:off x="4457647" y="2543503"/>
+            <a:ext cx="2316689" cy="711069"/>
           </a:xfrm>
           <a:prstGeom prst="roundRect">
             <a:avLst/>
@@ -5414,56 +5535,6 @@
             <a:solidFill>
               <a:srgbClr val="E1E5EF"/>
             </a:solidFill>
-          </a:ln>
-        </p:spPr>
-        <p:style>
-          <a:lnRef idx="1">
-            <a:schemeClr val="accent1"/>
-          </a:lnRef>
-          <a:fillRef idx="3">
-            <a:schemeClr val="accent1"/>
-          </a:fillRef>
-          <a:effectRef idx="2">
-            <a:schemeClr val="accent1"/>
-          </a:effectRef>
-          <a:fontRef idx="minor">
-            <a:schemeClr val="lt1"/>
-          </a:fontRef>
-        </p:style>
-        <p:txBody>
-          <a:bodyPr rtlCol="0" anchor="ctr"/>
-          <a:lstStyle/>
-          <a:p>
-            <a:pPr algn="ctr"/>
-            <a:endParaRPr/>
-          </a:p>
-        </p:txBody>
-      </p:sp>
-      <p:sp>
-        <p:nvSpPr>
-          <p:cNvPr id="10" name="Rounded Rectangle 9">
-            <a:extLst>
-              <a:ext uri="{FF2B5EF4-FFF2-40B4-BE49-F238E27FC236}">
-                <a16:creationId xmlns:a16="http://schemas.microsoft.com/office/drawing/2014/main" id="{CBB883C5-16D5-F3FB-623F-29CFB3AF2814}"/>
-              </a:ext>
-            </a:extLst>
-          </p:cNvPr>
-          <p:cNvSpPr/>
-          <p:nvPr/>
-        </p:nvSpPr>
-        <p:spPr>
-          <a:xfrm>
-            <a:off x="4617720" y="2011680"/>
-            <a:ext cx="502920" cy="109728"/>
-          </a:xfrm>
-          <a:prstGeom prst="roundRect">
-            <a:avLst/>
-          </a:prstGeom>
-          <a:solidFill>
-            <a:srgbClr val="8463C7"/>
-          </a:solidFill>
-          <a:ln>
-            <a:noFill/>
           </a:ln>
         </p:spPr>
         <p:style>
@@ -5503,7 +5574,7 @@
         </p:nvSpPr>
         <p:spPr>
           <a:xfrm>
-            <a:off x="4568163" y="2232839"/>
+            <a:off x="4568163" y="2753847"/>
             <a:ext cx="2898648" cy="307777"/>
           </a:xfrm>
           <a:prstGeom prst="rect">
@@ -5536,56 +5607,6 @@
               </a:solidFill>
               <a:latin typeface="Aptos"/>
             </a:endParaRPr>
-          </a:p>
-        </p:txBody>
-      </p:sp>
-      <p:sp>
-        <p:nvSpPr>
-          <p:cNvPr id="14" name="Rounded Rectangle 13">
-            <a:extLst>
-              <a:ext uri="{FF2B5EF4-FFF2-40B4-BE49-F238E27FC236}">
-                <a16:creationId xmlns:a16="http://schemas.microsoft.com/office/drawing/2014/main" id="{0EE8D648-C28F-1A5F-7AA0-1740C89615AB}"/>
-              </a:ext>
-            </a:extLst>
-          </p:cNvPr>
-          <p:cNvSpPr/>
-          <p:nvPr/>
-        </p:nvSpPr>
-        <p:spPr>
-          <a:xfrm>
-            <a:off x="8403336" y="2066544"/>
-            <a:ext cx="502920" cy="109728"/>
-          </a:xfrm>
-          <a:prstGeom prst="roundRect">
-            <a:avLst/>
-          </a:prstGeom>
-          <a:solidFill>
-            <a:srgbClr val="B099DB"/>
-          </a:solidFill>
-          <a:ln>
-            <a:noFill/>
-          </a:ln>
-        </p:spPr>
-        <p:style>
-          <a:lnRef idx="1">
-            <a:schemeClr val="accent1"/>
-          </a:lnRef>
-          <a:fillRef idx="3">
-            <a:schemeClr val="accent1"/>
-          </a:fillRef>
-          <a:effectRef idx="2">
-            <a:schemeClr val="accent1"/>
-          </a:effectRef>
-          <a:fontRef idx="minor">
-            <a:schemeClr val="lt1"/>
-          </a:fontRef>
-        </p:style>
-        <p:txBody>
-          <a:bodyPr rtlCol="0" anchor="ctr"/>
-          <a:lstStyle/>
-          <a:p>
-            <a:pPr algn="ctr"/>
-            <a:endParaRPr/>
           </a:p>
         </p:txBody>
       </p:sp>
@@ -5603,7 +5624,7 @@
         </p:nvSpPr>
         <p:spPr>
           <a:xfrm>
-            <a:off x="8302752" y="2358274"/>
+            <a:off x="8328555" y="2756858"/>
             <a:ext cx="2898648" cy="307777"/>
           </a:xfrm>
           <a:prstGeom prst="rect">
@@ -5705,64 +5726,14 @@
         </p:blipFill>
         <p:spPr>
           <a:xfrm>
-            <a:off x="631017" y="4414435"/>
-            <a:ext cx="2356210" cy="2255154"/>
+            <a:off x="631017" y="4666281"/>
+            <a:ext cx="2356210" cy="672973"/>
           </a:xfrm>
           <a:prstGeom prst="rect">
             <a:avLst/>
           </a:prstGeom>
         </p:spPr>
       </p:pic>
-      <p:sp>
-        <p:nvSpPr>
-          <p:cNvPr id="23" name="Rounded Rectangle 5">
-            <a:extLst>
-              <a:ext uri="{FF2B5EF4-FFF2-40B4-BE49-F238E27FC236}">
-                <a16:creationId xmlns:a16="http://schemas.microsoft.com/office/drawing/2014/main" id="{E0F1D9FB-A8B9-4E9F-642B-D0DE5FEFE16F}"/>
-              </a:ext>
-            </a:extLst>
-          </p:cNvPr>
-          <p:cNvSpPr/>
-          <p:nvPr/>
-        </p:nvSpPr>
-        <p:spPr>
-          <a:xfrm>
-            <a:off x="932688" y="4622234"/>
-            <a:ext cx="502920" cy="109728"/>
-          </a:xfrm>
-          <a:prstGeom prst="roundRect">
-            <a:avLst/>
-          </a:prstGeom>
-          <a:solidFill>
-            <a:srgbClr val="7552BE"/>
-          </a:solidFill>
-          <a:ln>
-            <a:noFill/>
-          </a:ln>
-        </p:spPr>
-        <p:style>
-          <a:lnRef idx="1">
-            <a:schemeClr val="accent1"/>
-          </a:lnRef>
-          <a:fillRef idx="3">
-            <a:schemeClr val="accent1"/>
-          </a:fillRef>
-          <a:effectRef idx="2">
-            <a:schemeClr val="accent1"/>
-          </a:effectRef>
-          <a:fontRef idx="minor">
-            <a:schemeClr val="lt1"/>
-          </a:fontRef>
-        </p:style>
-        <p:txBody>
-          <a:bodyPr rtlCol="0" anchor="ctr"/>
-          <a:lstStyle/>
-          <a:p>
-            <a:pPr algn="ctr"/>
-            <a:endParaRPr/>
-          </a:p>
-        </p:txBody>
-      </p:sp>
       <p:sp>
         <p:nvSpPr>
           <p:cNvPr id="25" name="TextBox 24">
@@ -5860,56 +5831,6 @@
               </a:solidFill>
               <a:latin typeface="Aptos"/>
             </a:endParaRPr>
-          </a:p>
-        </p:txBody>
-      </p:sp>
-      <p:sp>
-        <p:nvSpPr>
-          <p:cNvPr id="31" name="Rounded Rectangle 9">
-            <a:extLst>
-              <a:ext uri="{FF2B5EF4-FFF2-40B4-BE49-F238E27FC236}">
-                <a16:creationId xmlns:a16="http://schemas.microsoft.com/office/drawing/2014/main" id="{5F72BC41-70AB-ADE1-F5DC-C82D5DD10BE0}"/>
-              </a:ext>
-            </a:extLst>
-          </p:cNvPr>
-          <p:cNvSpPr/>
-          <p:nvPr/>
-        </p:nvSpPr>
-        <p:spPr>
-          <a:xfrm>
-            <a:off x="4636008" y="4622234"/>
-            <a:ext cx="502920" cy="109728"/>
-          </a:xfrm>
-          <a:prstGeom prst="roundRect">
-            <a:avLst/>
-          </a:prstGeom>
-          <a:solidFill>
-            <a:srgbClr val="8463C7"/>
-          </a:solidFill>
-          <a:ln>
-            <a:noFill/>
-          </a:ln>
-        </p:spPr>
-        <p:style>
-          <a:lnRef idx="1">
-            <a:schemeClr val="accent1"/>
-          </a:lnRef>
-          <a:fillRef idx="3">
-            <a:schemeClr val="accent1"/>
-          </a:fillRef>
-          <a:effectRef idx="2">
-            <a:schemeClr val="accent1"/>
-          </a:effectRef>
-          <a:fontRef idx="minor">
-            <a:schemeClr val="lt1"/>
-          </a:fontRef>
-        </p:style>
-        <p:txBody>
-          <a:bodyPr rtlCol="0" anchor="ctr"/>
-          <a:lstStyle/>
-          <a:p>
-            <a:pPr algn="ctr"/>
-            <a:endParaRPr/>
           </a:p>
         </p:txBody>
       </p:sp>
@@ -5935,8 +5856,8 @@
         </p:blipFill>
         <p:spPr>
           <a:xfrm>
-            <a:off x="8302750" y="4349508"/>
-            <a:ext cx="2414225" cy="2127688"/>
+            <a:off x="8302750" y="4666281"/>
+            <a:ext cx="2522905" cy="672974"/>
           </a:xfrm>
           <a:prstGeom prst="rect">
             <a:avLst/>
@@ -5993,36 +5914,6 @@
           </a:p>
         </p:txBody>
       </p:sp>
-      <p:pic>
-        <p:nvPicPr>
-          <p:cNvPr id="45" name="Picture 44">
-            <a:extLst>
-              <a:ext uri="{FF2B5EF4-FFF2-40B4-BE49-F238E27FC236}">
-                <a16:creationId xmlns:a16="http://schemas.microsoft.com/office/drawing/2014/main" id="{40C73CC9-3E73-3960-B53A-DD7A8034C9CD}"/>
-              </a:ext>
-            </a:extLst>
-          </p:cNvPr>
-          <p:cNvPicPr>
-            <a:picLocks noChangeAspect="1"/>
-          </p:cNvPicPr>
-          <p:nvPr/>
-        </p:nvPicPr>
-        <p:blipFill>
-          <a:blip r:embed="rId4"/>
-          <a:stretch>
-            <a:fillRect/>
-          </a:stretch>
-        </p:blipFill>
-        <p:spPr>
-          <a:xfrm>
-            <a:off x="8403336" y="4562726"/>
-            <a:ext cx="591363" cy="195089"/>
-          </a:xfrm>
-          <a:prstGeom prst="rect">
-            <a:avLst/>
-          </a:prstGeom>
-        </p:spPr>
-      </p:pic>
     </p:spTree>
     <p:extLst>
       <p:ext uri="{BB962C8B-B14F-4D97-AF65-F5344CB8AC3E}">
@@ -6170,7 +6061,7 @@
           <a:p>
             <a:pPr algn="l"/>
             <a:r>
-              <a:rPr sz="1400" b="0">
+              <a:rPr sz="1400" b="0" dirty="0">
                 <a:solidFill>
                   <a:srgbClr val="636D82"/>
                 </a:solidFill>
@@ -6631,7 +6522,7 @@
           <a:p>
             <a:pPr algn="l"/>
             <a:r>
-              <a:rPr sz="1700" b="1" dirty="0" err="1">
+              <a:rPr sz="1700" b="1" dirty="0">
                 <a:solidFill>
                   <a:srgbClr val="182745"/>
                 </a:solidFill>
@@ -6639,12 +6530,6 @@
               </a:rPr>
               <a:t>OpenAlex</a:t>
             </a:r>
-            <a:endParaRPr sz="1700" b="1" dirty="0">
-              <a:solidFill>
-                <a:srgbClr val="182745"/>
-              </a:solidFill>
-              <a:latin typeface="Aptos"/>
-            </a:endParaRPr>
           </a:p>
         </p:txBody>
       </p:sp>
@@ -6879,7 +6764,7 @@
           <a:p>
             <a:pPr algn="ctr"/>
             <a:r>
-              <a:rPr sz="1200" b="1">
+              <a:rPr sz="1200" b="1" dirty="0">
                 <a:solidFill>
                   <a:srgbClr val="182745"/>
                 </a:solidFill>
@@ -6961,7 +6846,7 @@
           <a:p>
             <a:pPr algn="ctr"/>
             <a:r>
-              <a:rPr sz="1200" b="1">
+              <a:rPr sz="1200" b="1" dirty="0">
                 <a:solidFill>
                   <a:srgbClr val="182745"/>
                 </a:solidFill>
@@ -7043,7 +6928,7 @@
           <a:p>
             <a:pPr algn="ctr"/>
             <a:r>
-              <a:rPr sz="1200" b="1">
+              <a:rPr sz="1200" b="1" dirty="0">
                 <a:solidFill>
                   <a:srgbClr val="182745"/>
                 </a:solidFill>
@@ -7372,7 +7257,7 @@
           <a:p>
             <a:pPr algn="l"/>
             <a:r>
-              <a:rPr sz="1250" b="0">
+              <a:rPr sz="1250" b="0" dirty="0">
                 <a:solidFill>
                   <a:srgbClr val="1E2739"/>
                 </a:solidFill>
@@ -7488,7 +7373,7 @@
           <a:p>
             <a:pPr algn="l"/>
             <a:r>
-              <a:rPr sz="1250" b="0">
+              <a:rPr sz="1250" b="0" dirty="0">
                 <a:solidFill>
                   <a:srgbClr val="1E2739"/>
                 </a:solidFill>
@@ -7604,7 +7489,7 @@
           <a:p>
             <a:pPr algn="l"/>
             <a:r>
-              <a:rPr sz="1250" b="0">
+              <a:rPr sz="1250" b="0" dirty="0">
                 <a:solidFill>
                   <a:srgbClr val="1E2739"/>
                 </a:solidFill>
@@ -7719,7 +7604,7 @@
           <a:p>
             <a:pPr algn="l"/>
             <a:r>
-              <a:rPr sz="1250" b="0">
+              <a:rPr sz="1250" b="0" dirty="0">
                 <a:solidFill>
                   <a:srgbClr val="1E2739"/>
                 </a:solidFill>
@@ -7759,7 +7644,7 @@
           <a:p>
             <a:pPr algn="ctr"/>
             <a:r>
-              <a:rPr sz="3100" b="1">
+              <a:rPr sz="3100" b="1" dirty="0">
                 <a:solidFill>
                   <a:srgbClr val="182745"/>
                 </a:solidFill>
@@ -7797,7 +7682,7 @@
           <a:p>
             <a:pPr algn="ctr"/>
             <a:r>
-              <a:rPr sz="1200" b="0">
+              <a:rPr sz="1200" b="0" dirty="0">
                 <a:solidFill>
                   <a:srgbClr val="636D82"/>
                 </a:solidFill>
@@ -8476,7 +8361,7 @@
           <a:p>
             <a:pPr algn="ctr"/>
             <a:r>
-              <a:rPr sz="1100" b="0">
+              <a:rPr sz="1100" b="0" dirty="0">
                 <a:solidFill>
                   <a:srgbClr val="636D82"/>
                 </a:solidFill>
@@ -8654,33 +8539,51 @@
         </p:nvSpPr>
         <p:spPr>
           <a:xfrm>
-            <a:off x="2414016" y="3346704"/>
-            <a:ext cx="1755648" cy="530352"/>
-          </a:xfrm>
-          <a:prstGeom prst="rect">
-            <a:avLst/>
-          </a:prstGeom>
-          <a:noFill/>
-          <a:ln>
-            <a:noFill/>
-          </a:ln>
-        </p:spPr>
-        <p:txBody>
-          <a:bodyPr wrap="square" anchor="ctr">
-            <a:spAutoFit/>
-          </a:bodyPr>
-          <a:lstStyle/>
-          <a:p>
-            <a:pPr algn="ctr"/>
-            <a:r>
-              <a:rPr sz="1100" b="0">
+            <a:off x="2414016" y="3396436"/>
+            <a:ext cx="1755648" cy="430887"/>
+          </a:xfrm>
+          <a:prstGeom prst="rect">
+            <a:avLst/>
+          </a:prstGeom>
+          <a:noFill/>
+          <a:ln>
+            <a:noFill/>
+          </a:ln>
+        </p:spPr>
+        <p:txBody>
+          <a:bodyPr wrap="square" anchor="ctr">
+            <a:spAutoFit/>
+          </a:bodyPr>
+          <a:lstStyle/>
+          <a:p>
+            <a:pPr algn="ctr"/>
+            <a:r>
+              <a:rPr sz="1100" b="0" dirty="0">
                 <a:solidFill>
                   <a:srgbClr val="636D82"/>
                 </a:solidFill>
                 <a:latin typeface="Aptos"/>
               </a:rPr>
               <a:t>cleaning +
-harmonisation</a:t>
+harmoni</a:t>
+            </a:r>
+            <a:r>
+              <a:rPr lang="en-US" sz="1100" b="0" dirty="0">
+                <a:solidFill>
+                  <a:srgbClr val="636D82"/>
+                </a:solidFill>
+                <a:latin typeface="Aptos"/>
+              </a:rPr>
+              <a:t>z</a:t>
+            </a:r>
+            <a:r>
+              <a:rPr sz="1100" b="0" dirty="0">
+                <a:solidFill>
+                  <a:srgbClr val="636D82"/>
+                </a:solidFill>
+                <a:latin typeface="Aptos"/>
+              </a:rPr>
+              <a:t>ation</a:t>
             </a:r>
           </a:p>
         </p:txBody>
@@ -8870,7 +8773,7 @@
           <a:p>
             <a:pPr algn="ctr"/>
             <a:r>
-              <a:rPr sz="1100" b="0">
+              <a:rPr sz="1100" b="0" dirty="0">
                 <a:solidFill>
                   <a:srgbClr val="636D82"/>
                 </a:solidFill>
@@ -9475,7 +9378,7 @@
           <a:p>
             <a:pPr algn="ctr"/>
             <a:r>
-              <a:rPr sz="1100" b="0">
+              <a:rPr sz="1100" b="0" dirty="0">
                 <a:solidFill>
                   <a:srgbClr val="636D82"/>
                 </a:solidFill>
@@ -9924,7 +9827,7 @@
         </p:nvSpPr>
         <p:spPr>
           <a:xfrm>
-            <a:off x="1088136" y="3255145"/>
+            <a:off x="1088136" y="3149694"/>
             <a:ext cx="4544568" cy="1600438"/>
           </a:xfrm>
           <a:prstGeom prst="rect">
@@ -11592,7 +11495,7 @@
         <p:spPr>
           <a:xfrm>
             <a:off x="7818120" y="4343400"/>
-            <a:ext cx="3291840" cy="1298448"/>
+            <a:ext cx="3291840" cy="1402772"/>
           </a:xfrm>
           <a:prstGeom prst="roundRect">
             <a:avLst/>
